--- a/vta/slides/Module_8_Sedation_Analgesia.pptx
+++ b/vta/slides/Module_8_Sedation_Analgesia.pptx
@@ -964,11 +964,11 @@
           <a:p>
             <a:r>
               <a:rPr lang="en-US" dirty="0"/>
-              <a:t>Post-intubation hypotension affects ~25% of EMS RSI (Heffner 2012). The fix is anticipation.
-Push-dose epinephrine — first-line for most EMS shock states. Mix 1 mg (1:10,000) into 100 mL NS = 10 mcg/mL. Dose 5–20 mcg IV (typically 10 mcg) every 1–5 min. Onset 1 min, duration 5–10 min. Inotropy + vasoconstriction.
+              <a:t>Post-intubation hypotension is common after emergency intubation — about 25% in Heffner's 2012 emergency-department cohort (an ED, not prehospital, study; anticipate it in the field too). The fix is anticipation.
+Push-dose epinephrine — a rapid bridge for peri-intubation hypotension. Mix 1 mg (1:10,000) into 100 mL NS = 10 mcg/mL. Dose 5–20 mcg IV (typically 10 mcg) every 1–5 min. Onset 1 min, duration 5–10 min. Inotropy + vasoconstriction. It buys time until a continuous infusion is running — it is not the definitive pressor.
 Push-dose phenylephrine — alternative when avoiding tachycardia. Mix 10 mg into 100 mL NS = 100 mcg/mL. Dose 50–200 mcg IV q1–5 min. Pure α-agonist; reflex bradycardia possible.
 Label every syringe clearly. Document every push. Move to a continuous infusion as soon as practical — norepinephrine is the first-line infused vasopressor for most shock states (Surviving Sepsis 2021), started at 0.05–0.1 mcg/kg/min and titrated to MAP ≥ 65, and it can run peripherally through a good IV for transport. Push-dose pressors are a bridge to that infusion.
-EVIDENCE — Post-intubation hypotension: Heffner 2012: incidence ~25% in EMS RSI. Higher in shock states. Always have push-dose pressors prepared before pushing the induction agent.</a:t>
+EVIDENCE — Post-intubation hypotension: Heffner 2012: ~25% incidence in an emergency-department intubation cohort (not a prehospital study). Higher in shock states. Always have push-dose pressors prepared before pushing the induction agent.</a:t>
             </a:r>
             <a:endParaRPr lang="en-US" dirty="0"/>
           </a:p>
@@ -1878,7 +1878,7 @@
                 <a:ea typeface="Calibri" pitchFamily="34" charset="-122"/>
                 <a:cs typeface="Calibri" pitchFamily="34" charset="-120"/>
               </a:rPr>
-              <a:t>Day 2 · Application</a:t>
+              <a:t>Application</a:t>
             </a:r>
             <a:pPr indent="0" marL="0">
               <a:buNone/>
@@ -1892,7 +1892,7 @@
                 <a:ea typeface="Calibri" pitchFamily="34" charset="-122"/>
                 <a:cs typeface="Calibri" pitchFamily="34" charset="-120"/>
               </a:rPr>
-              <a:t>   ·   ~40 min   ·   5 lessons</a:t>
+              <a:t>   ·   5 lessons</a:t>
             </a:r>
             <a:endParaRPr lang="en-US" sz="1300" dirty="0"/>
           </a:p>
@@ -2880,7 +2880,7 @@
         <p:spPr>
           <a:xfrm>
             <a:off x="548640" y="2148840"/>
-            <a:ext cx="6309360" cy="4114800"/>
+            <a:ext cx="6309360" cy="4160520"/>
           </a:xfrm>
           <a:prstGeom prst="rect">
             <a:avLst/>
@@ -2897,13 +2897,13 @@
                 <a:spcPct val="100000"/>
               </a:lnSpc>
               <a:spcAft>
-                <a:spcPts val="900"/>
+                <a:spcPts val="800"/>
               </a:spcAft>
               <a:buSzPct val="100000"/>
               <a:buChar char="•"/>
             </a:pPr>
             <a:r>
-              <a:rPr lang="en-US" sz="1550" dirty="0">
+              <a:rPr lang="en-US" sz="1450" dirty="0">
                 <a:solidFill>
                   <a:srgbClr val="1B2433"/>
                 </a:solidFill>
@@ -2913,7 +2913,7 @@
               </a:rPr>
               <a:t>Comfort: an ETT is uncomfortable; bucking the vent is exhausting.</a:t>
             </a:r>
-            <a:endParaRPr lang="en-US" sz="1550" dirty="0"/>
+            <a:endParaRPr lang="en-US" sz="1450" dirty="0"/>
           </a:p>
           <a:p>
             <a:pPr marL="177800" indent="-177800">
@@ -2921,13 +2921,13 @@
                 <a:spcPct val="100000"/>
               </a:lnSpc>
               <a:spcAft>
-                <a:spcPts val="900"/>
+                <a:spcPts val="800"/>
               </a:spcAft>
               <a:buSzPct val="100000"/>
               <a:buChar char="•"/>
             </a:pPr>
             <a:r>
-              <a:rPr lang="en-US" sz="1550" dirty="0">
+              <a:rPr lang="en-US" sz="1450" dirty="0">
                 <a:solidFill>
                   <a:srgbClr val="1B2433"/>
                 </a:solidFill>
@@ -2937,7 +2937,7 @@
               </a:rPr>
               <a:t>Synchrony: a patient fighting the vent generates dangerously high airway pressures (barotrauma).</a:t>
             </a:r>
-            <a:endParaRPr lang="en-US" sz="1550" dirty="0"/>
+            <a:endParaRPr lang="en-US" sz="1450" dirty="0"/>
           </a:p>
           <a:p>
             <a:pPr marL="177800" indent="-177800">
@@ -2945,13 +2945,13 @@
                 <a:spcPct val="100000"/>
               </a:lnSpc>
               <a:spcAft>
-                <a:spcPts val="900"/>
+                <a:spcPts val="800"/>
               </a:spcAft>
               <a:buSzPct val="100000"/>
               <a:buChar char="•"/>
             </a:pPr>
             <a:r>
-              <a:rPr lang="en-US" sz="1550" dirty="0">
+              <a:rPr lang="en-US" sz="1450" dirty="0">
                 <a:solidFill>
                   <a:srgbClr val="1B2433"/>
                 </a:solidFill>
@@ -2961,7 +2961,7 @@
               </a:rPr>
               <a:t>Safety: awake fighting patients pull tubes and lines — self-extubation is a sentinel event.</a:t>
             </a:r>
-            <a:endParaRPr lang="en-US" sz="1550" dirty="0"/>
+            <a:endParaRPr lang="en-US" sz="1450" dirty="0"/>
           </a:p>
           <a:p>
             <a:pPr marL="177800" indent="-177800">
@@ -2969,13 +2969,13 @@
                 <a:spcPct val="100000"/>
               </a:lnSpc>
               <a:spcAft>
-                <a:spcPts val="900"/>
+                <a:spcPts val="800"/>
               </a:spcAft>
               <a:buSzPct val="100000"/>
               <a:buChar char="•"/>
             </a:pPr>
             <a:r>
-              <a:rPr lang="en-US" sz="1550" dirty="0">
+              <a:rPr lang="en-US" sz="1450" dirty="0">
                 <a:solidFill>
                   <a:srgbClr val="1B2433"/>
                 </a:solidFill>
@@ -2985,7 +2985,7 @@
               </a:rPr>
               <a:t>Oxygenation: lower work of breathing = lower O₂ demand = easier oxygenation.</a:t>
             </a:r>
-            <a:endParaRPr lang="en-US" sz="1550" dirty="0"/>
+            <a:endParaRPr lang="en-US" sz="1450" dirty="0"/>
           </a:p>
           <a:p>
             <a:pPr marL="177800" indent="-177800">
@@ -2993,13 +2993,13 @@
                 <a:spcPct val="100000"/>
               </a:lnSpc>
               <a:spcAft>
-                <a:spcPts val="900"/>
+                <a:spcPts val="800"/>
               </a:spcAft>
               <a:buSzPct val="100000"/>
               <a:buChar char="•"/>
             </a:pPr>
             <a:r>
-              <a:rPr lang="en-US" sz="1550" dirty="0">
+              <a:rPr lang="en-US" sz="1450" dirty="0">
                 <a:solidFill>
                   <a:srgbClr val="1B2433"/>
                 </a:solidFill>
@@ -3009,7 +3009,7 @@
               </a:rPr>
               <a:t>Hemodynamics: well-sedated patients have less sympathetic drive and more predictable response to vasopressors.</a:t>
             </a:r>
-            <a:endParaRPr lang="en-US" sz="1550" dirty="0"/>
+            <a:endParaRPr lang="en-US" sz="1450" dirty="0"/>
           </a:p>
         </p:txBody>
       </p:sp>
@@ -3316,7 +3316,7 @@
         <p:spPr>
           <a:xfrm>
             <a:off x="548640" y="2148840"/>
-            <a:ext cx="10058400" cy="4114800"/>
+            <a:ext cx="10058400" cy="4160520"/>
           </a:xfrm>
           <a:prstGeom prst="rect">
             <a:avLst/>
@@ -3333,13 +3333,13 @@
                 <a:spcPct val="100000"/>
               </a:lnSpc>
               <a:spcAft>
-                <a:spcPts val="900"/>
+                <a:spcPts val="800"/>
               </a:spcAft>
               <a:buSzPct val="100000"/>
               <a:buChar char="•"/>
             </a:pPr>
             <a:r>
-              <a:rPr lang="en-US" sz="1550" dirty="0">
+              <a:rPr lang="en-US" sz="1450" dirty="0">
                 <a:solidFill>
                   <a:srgbClr val="1B2433"/>
                 </a:solidFill>
@@ -3349,7 +3349,7 @@
               </a:rPr>
               <a:t>Richmond Agitation-Sedation Scale runs +4 (combative) to −5 (unarousable).</a:t>
             </a:r>
-            <a:endParaRPr lang="en-US" sz="1550" dirty="0"/>
+            <a:endParaRPr lang="en-US" sz="1450" dirty="0"/>
           </a:p>
           <a:p>
             <a:pPr marL="177800" indent="-177800">
@@ -3357,13 +3357,13 @@
                 <a:spcPct val="100000"/>
               </a:lnSpc>
               <a:spcAft>
-                <a:spcPts val="900"/>
+                <a:spcPts val="800"/>
               </a:spcAft>
               <a:buSzPct val="100000"/>
               <a:buChar char="•"/>
             </a:pPr>
             <a:r>
-              <a:rPr lang="en-US" sz="1550" dirty="0">
+              <a:rPr lang="en-US" sz="1450" dirty="0">
                 <a:solidFill>
                   <a:srgbClr val="1B2433"/>
                 </a:solidFill>
@@ -3371,9 +3371,9 @@
                 <a:ea typeface="Calibri" pitchFamily="34" charset="-122"/>
                 <a:cs typeface="Calibri" pitchFamily="34" charset="-120"/>
               </a:rPr>
-              <a:t>+4 combative danger to staff.</a:t>
-            </a:r>
-            <a:endParaRPr lang="en-US" sz="1550" dirty="0"/>
+              <a:t>+4 combative danger to staff. +3 very agitated, pulls at tubes. +2 agitated, fights vent. +1 restless but cooperative.</a:t>
+            </a:r>
+            <a:endParaRPr lang="en-US" sz="1450" dirty="0"/>
           </a:p>
           <a:p>
             <a:pPr marL="177800" indent="-177800">
@@ -3381,13 +3381,13 @@
                 <a:spcPct val="100000"/>
               </a:lnSpc>
               <a:spcAft>
-                <a:spcPts val="900"/>
+                <a:spcPts val="800"/>
               </a:spcAft>
               <a:buSzPct val="100000"/>
               <a:buChar char="•"/>
             </a:pPr>
             <a:r>
-              <a:rPr lang="en-US" sz="1550" dirty="0">
+              <a:rPr lang="en-US" sz="1450" dirty="0">
                 <a:solidFill>
                   <a:srgbClr val="1B2433"/>
                 </a:solidFill>
@@ -3397,7 +3397,7 @@
               </a:rPr>
               <a:t>0 alert and calm.</a:t>
             </a:r>
-            <a:endParaRPr lang="en-US" sz="1550" dirty="0"/>
+            <a:endParaRPr lang="en-US" sz="1450" dirty="0"/>
           </a:p>
           <a:p>
             <a:pPr marL="177800" indent="-177800">
@@ -3405,13 +3405,13 @@
                 <a:spcPct val="100000"/>
               </a:lnSpc>
               <a:spcAft>
-                <a:spcPts val="900"/>
+                <a:spcPts val="800"/>
               </a:spcAft>
               <a:buSzPct val="100000"/>
               <a:buChar char="•"/>
             </a:pPr>
             <a:r>
-              <a:rPr lang="en-US" sz="1550" dirty="0">
+              <a:rPr lang="en-US" sz="1450" dirty="0">
                 <a:solidFill>
                   <a:srgbClr val="1B2433"/>
                 </a:solidFill>
@@ -3419,9 +3419,9 @@
                 <a:ea typeface="Calibri" pitchFamily="34" charset="-122"/>
                 <a:cs typeface="Calibri" pitchFamily="34" charset="-120"/>
               </a:rPr>
-              <a:t>−1 drowsy, sustained eye contact &gt; 10 sec to voice.</a:t>
-            </a:r>
-            <a:endParaRPr lang="en-US" sz="1550" dirty="0"/>
+              <a:t>−1 drowsy, sustained eye contact &gt; 10 sec to voice. −2 light sedation, briefly opens eyes to voice. −3 moderate, movement to voice no eye contact. −4 deep, movement to physical stimulus only.</a:t>
+            </a:r>
+            <a:endParaRPr lang="en-US" sz="1450" dirty="0"/>
           </a:p>
           <a:p>
             <a:pPr marL="177800" indent="-177800">
@@ -3429,13 +3429,13 @@
                 <a:spcPct val="100000"/>
               </a:lnSpc>
               <a:spcAft>
-                <a:spcPts val="900"/>
+                <a:spcPts val="800"/>
               </a:spcAft>
               <a:buSzPct val="100000"/>
               <a:buChar char="•"/>
             </a:pPr>
             <a:r>
-              <a:rPr lang="en-US" sz="1550" dirty="0">
+              <a:rPr lang="en-US" sz="1450" dirty="0">
                 <a:solidFill>
                   <a:srgbClr val="1B2433"/>
                 </a:solidFill>
@@ -3443,9 +3443,9 @@
                 <a:ea typeface="Calibri" pitchFamily="34" charset="-122"/>
                 <a:cs typeface="Calibri" pitchFamily="34" charset="-120"/>
               </a:rPr>
-              <a:t>Transport target is RASS −1 to −2.</a:t>
-            </a:r>
-            <a:endParaRPr lang="en-US" sz="1550" dirty="0"/>
+              <a:t>Transport target is RASS −1 to −2. Deeper than −2 makes handoff assessment hard. Lighter than −1 risks self-extubation.</a:t>
+            </a:r>
+            <a:endParaRPr lang="en-US" sz="1450" dirty="0"/>
           </a:p>
         </p:txBody>
       </p:sp>
@@ -3607,7 +3607,7 @@
         <p:spPr>
           <a:xfrm>
             <a:off x="548640" y="2148840"/>
-            <a:ext cx="10058400" cy="4114800"/>
+            <a:ext cx="10058400" cy="4160520"/>
           </a:xfrm>
           <a:prstGeom prst="rect">
             <a:avLst/>
@@ -3624,13 +3624,13 @@
                 <a:spcPct val="100000"/>
               </a:lnSpc>
               <a:spcAft>
-                <a:spcPts val="900"/>
+                <a:spcPts val="800"/>
               </a:spcAft>
               <a:buSzPct val="100000"/>
               <a:buChar char="•"/>
             </a:pPr>
             <a:r>
-              <a:rPr lang="en-US" sz="1550" dirty="0">
+              <a:rPr lang="en-US" sz="1450" dirty="0">
                 <a:solidFill>
                   <a:srgbClr val="1B2433"/>
                 </a:solidFill>
@@ -3638,9 +3638,9 @@
                 <a:ea typeface="Calibri" pitchFamily="34" charset="-122"/>
                 <a:cs typeface="Calibri" pitchFamily="34" charset="-120"/>
               </a:rPr>
-              <a:t>Fentanyl 1–2 mcg/kg IV, redose 0.5–1 mcg/kg q15–20 min.</a:t>
-            </a:r>
-            <a:endParaRPr lang="en-US" sz="1550" dirty="0"/>
+              <a:t>Fentanyl 1–2 mcg/kg IV, redose 0.5–1 mcg/kg q15–20 min. Analgesia first. Watch chest wall rigidity at high doses pushed rapidly.</a:t>
+            </a:r>
+            <a:endParaRPr lang="en-US" sz="1450" dirty="0"/>
           </a:p>
           <a:p>
             <a:pPr marL="177800" indent="-177800">
@@ -3648,13 +3648,13 @@
                 <a:spcPct val="100000"/>
               </a:lnSpc>
               <a:spcAft>
-                <a:spcPts val="900"/>
+                <a:spcPts val="800"/>
               </a:spcAft>
               <a:buSzPct val="100000"/>
               <a:buChar char="•"/>
             </a:pPr>
             <a:r>
-              <a:rPr lang="en-US" sz="1550" dirty="0">
+              <a:rPr lang="en-US" sz="1450" dirty="0">
                 <a:solidFill>
                   <a:srgbClr val="1B2433"/>
                 </a:solidFill>
@@ -3662,9 +3662,9 @@
                 <a:ea typeface="Calibri" pitchFamily="34" charset="-122"/>
                 <a:cs typeface="Calibri" pitchFamily="34" charset="-120"/>
               </a:rPr>
-              <a:t>Ketamine 1–2 mg/kg IV induction; 0.5–1 mg/kg redose.</a:t>
-            </a:r>
-            <a:endParaRPr lang="en-US" sz="1550" dirty="0"/>
+              <a:t>Ketamine 1–2 mg/kg IV induction; 0.5–1 mg/kg redose. PREFERRED in shock — sympathetic effect supports BP. KETASED (Jabre 2009): equivalent to etomidate, safer in shock. Modern evidence: acceptable in TBI.</a:t>
+            </a:r>
+            <a:endParaRPr lang="en-US" sz="1450" dirty="0"/>
           </a:p>
           <a:p>
             <a:pPr marL="177800" indent="-177800">
@@ -3672,13 +3672,13 @@
                 <a:spcPct val="100000"/>
               </a:lnSpc>
               <a:spcAft>
-                <a:spcPts val="900"/>
+                <a:spcPts val="800"/>
               </a:spcAft>
               <a:buSzPct val="100000"/>
               <a:buChar char="•"/>
             </a:pPr>
             <a:r>
-              <a:rPr lang="en-US" sz="1550" dirty="0">
+              <a:rPr lang="en-US" sz="1450" dirty="0">
                 <a:solidFill>
                   <a:srgbClr val="1B2433"/>
                 </a:solidFill>
@@ -3686,9 +3686,9 @@
                 <a:ea typeface="Calibri" pitchFamily="34" charset="-122"/>
                 <a:cs typeface="Calibri" pitchFamily="34" charset="-120"/>
               </a:rPr>
-              <a:t>Midazolam 0.05–0.1 mg/kg IV q5–10 min.</a:t>
-            </a:r>
-            <a:endParaRPr lang="en-US" sz="1550" dirty="0"/>
+              <a:t>Midazolam 0.05–0.1 mg/kg IV q5–10 min. Sedation + amnesia. Synergistic respiratory depression with opioids. Reversible with flumazenil.</a:t>
+            </a:r>
+            <a:endParaRPr lang="en-US" sz="1450" dirty="0"/>
           </a:p>
           <a:p>
             <a:pPr marL="177800" indent="-177800">
@@ -3696,13 +3696,13 @@
                 <a:spcPct val="100000"/>
               </a:lnSpc>
               <a:spcAft>
-                <a:spcPts val="900"/>
+                <a:spcPts val="800"/>
               </a:spcAft>
               <a:buSzPct val="100000"/>
               <a:buChar char="•"/>
             </a:pPr>
             <a:r>
-              <a:rPr lang="en-US" sz="1550" dirty="0">
+              <a:rPr lang="en-US" sz="1450" dirty="0">
                 <a:solidFill>
                   <a:srgbClr val="1B2433"/>
                 </a:solidFill>
@@ -3710,9 +3710,9 @@
                 <a:ea typeface="Calibri" pitchFamily="34" charset="-122"/>
                 <a:cs typeface="Calibri" pitchFamily="34" charset="-120"/>
               </a:rPr>
-              <a:t>Propofol 5–50 mcg/kg/min infusion (per service formulary).</a:t>
-            </a:r>
-            <a:endParaRPr lang="en-US" sz="1550" dirty="0"/>
+              <a:t>Propofol 5–50 mcg/kg/min infusion (per service formulary). Drops BP. PRIS (propofol-related infusion syndrome): metabolic acidosis, rhabdomyolysis, cardiac arrhythmia at &gt; 4 mg/kg/hr or &gt; 48 hr infusions.</a:t>
+            </a:r>
+            <a:endParaRPr lang="en-US" sz="1450" dirty="0"/>
           </a:p>
           <a:p>
             <a:pPr marL="177800" indent="-177800">
@@ -3720,13 +3720,13 @@
                 <a:spcPct val="100000"/>
               </a:lnSpc>
               <a:spcAft>
-                <a:spcPts val="900"/>
+                <a:spcPts val="800"/>
               </a:spcAft>
               <a:buSzPct val="100000"/>
               <a:buChar char="•"/>
             </a:pPr>
             <a:r>
-              <a:rPr lang="en-US" sz="1550" dirty="0">
+              <a:rPr lang="en-US" sz="1450" dirty="0">
                 <a:solidFill>
                   <a:srgbClr val="1B2433"/>
                 </a:solidFill>
@@ -3734,9 +3734,9 @@
                 <a:ea typeface="Calibri" pitchFamily="34" charset="-122"/>
                 <a:cs typeface="Calibri" pitchFamily="34" charset="-120"/>
               </a:rPr>
-              <a:t>Etomidate 0.3 mg/kg IV induction.</a:t>
-            </a:r>
-            <a:endParaRPr lang="en-US" sz="1550" dirty="0"/>
+              <a:t>Etomidate 0.3 mg/kg IV induction. Clean hemodynamics but causes adrenal suppression — many EMS prefer ketamine in shock RSI. Not carried by many EMS services.</a:t>
+            </a:r>
+            <a:endParaRPr lang="en-US" sz="1450" dirty="0"/>
           </a:p>
         </p:txBody>
       </p:sp>
@@ -3898,7 +3898,7 @@
         <p:spPr>
           <a:xfrm>
             <a:off x="548640" y="2148840"/>
-            <a:ext cx="6309360" cy="4114800"/>
+            <a:ext cx="6309360" cy="4160520"/>
           </a:xfrm>
           <a:prstGeom prst="rect">
             <a:avLst/>
@@ -3915,7 +3915,7 @@
                 <a:spcPct val="100000"/>
               </a:lnSpc>
               <a:spcAft>
-                <a:spcPts val="900"/>
+                <a:spcPts val="1000"/>
               </a:spcAft>
               <a:buSzPct val="100000"/>
               <a:buChar char="•"/>
@@ -3929,7 +3929,7 @@
                 <a:ea typeface="Calibri" pitchFamily="34" charset="-122"/>
                 <a:cs typeface="Calibri" pitchFamily="34" charset="-120"/>
               </a:rPr>
-              <a:t>Post-intubation hypotension affects ~25% of EMS RSI (Heffner 2012).</a:t>
+              <a:t>Post-intubation hypotension is common after emergency intubation — about 25% in Heffner's 2012 emergency-department cohort (an ED, not prehospital, study; anticipate it in the field too).</a:t>
             </a:r>
             <a:endParaRPr lang="en-US" sz="1550" dirty="0"/>
           </a:p>
@@ -3939,7 +3939,7 @@
                 <a:spcPct val="100000"/>
               </a:lnSpc>
               <a:spcAft>
-                <a:spcPts val="900"/>
+                <a:spcPts val="1000"/>
               </a:spcAft>
               <a:buSzPct val="100000"/>
               <a:buChar char="•"/>
@@ -3953,7 +3953,7 @@
                 <a:ea typeface="Calibri" pitchFamily="34" charset="-122"/>
                 <a:cs typeface="Calibri" pitchFamily="34" charset="-120"/>
               </a:rPr>
-              <a:t>Push-dose epinephrine — first-line for most EMS shock states.</a:t>
+              <a:t>Push-dose epinephrine — a rapid bridge for peri-intubation hypotension. Mix 1 mg (1:10,000) into 100 mL NS = 10 mcg/mL. Dose 5–20 mcg IV (typically 10 mcg) every 1–5 min.</a:t>
             </a:r>
             <a:endParaRPr lang="en-US" sz="1550" dirty="0"/>
           </a:p>
@@ -3963,7 +3963,7 @@
                 <a:spcPct val="100000"/>
               </a:lnSpc>
               <a:spcAft>
-                <a:spcPts val="900"/>
+                <a:spcPts val="1000"/>
               </a:spcAft>
               <a:buSzPct val="100000"/>
               <a:buChar char="•"/>
@@ -3977,7 +3977,7 @@
                 <a:ea typeface="Calibri" pitchFamily="34" charset="-122"/>
                 <a:cs typeface="Calibri" pitchFamily="34" charset="-120"/>
               </a:rPr>
-              <a:t>Push-dose phenylephrine — alternative when avoiding tachycardia.</a:t>
+              <a:t>Push-dose phenylephrine — alternative when avoiding tachycardia. Mix 10 mg into 100 mL NS = 100 mcg/mL. Dose 50–200 mcg IV q1–5 min. Pure α-agonist; reflex bradycardia possible.</a:t>
             </a:r>
             <a:endParaRPr lang="en-US" sz="1550" dirty="0"/>
           </a:p>
@@ -3987,7 +3987,7 @@
                 <a:spcPct val="100000"/>
               </a:lnSpc>
               <a:spcAft>
-                <a:spcPts val="900"/>
+                <a:spcPts val="1000"/>
               </a:spcAft>
               <a:buSzPct val="100000"/>
               <a:buChar char="•"/>
@@ -4001,7 +4001,7 @@
                 <a:ea typeface="Calibri" pitchFamily="34" charset="-122"/>
                 <a:cs typeface="Calibri" pitchFamily="34" charset="-120"/>
               </a:rPr>
-              <a:t>Label every syringe clearly.</a:t>
+              <a:t>Label every syringe clearly. Document every push.</a:t>
             </a:r>
             <a:endParaRPr lang="en-US" sz="1550" dirty="0"/>
           </a:p>
@@ -4146,7 +4146,7 @@
                 <a:ea typeface="Calibri" pitchFamily="34" charset="-122"/>
                 <a:cs typeface="Calibri" pitchFamily="34" charset="-120"/>
               </a:rPr>
-              <a:t>Heffner 2012: incidence ~25% in EMS RSI. Higher in shock states. Always have push-dose pressors prepared before pushing the induction agent.</a:t>
+              <a:t>Heffner 2012: ~25% incidence in an emergency-department intubation cohort (not a prehospital study). Higher in shock states. Always have push-dose pressors prepared before pushing the induction agent.</a:t>
             </a:r>
             <a:endParaRPr lang="en-US" sz="1350" dirty="0"/>
           </a:p>
@@ -4310,7 +4310,7 @@
         <p:spPr>
           <a:xfrm>
             <a:off x="548640" y="2148840"/>
-            <a:ext cx="10058400" cy="4114800"/>
+            <a:ext cx="10058400" cy="4160520"/>
           </a:xfrm>
           <a:prstGeom prst="rect">
             <a:avLst/>
@@ -4327,13 +4327,13 @@
                 <a:spcPct val="100000"/>
               </a:lnSpc>
               <a:spcAft>
-                <a:spcPts val="900"/>
+                <a:spcPts val="800"/>
               </a:spcAft>
               <a:buSzPct val="100000"/>
               <a:buChar char="•"/>
             </a:pPr>
             <a:r>
-              <a:rPr lang="en-US" sz="1550" dirty="0">
+              <a:rPr lang="en-US" sz="1450" dirty="0">
                 <a:solidFill>
                   <a:srgbClr val="1B2433"/>
                 </a:solidFill>
@@ -4341,9 +4341,9 @@
                 <a:ea typeface="Calibri" pitchFamily="34" charset="-122"/>
                 <a:cs typeface="Calibri" pitchFamily="34" charset="-120"/>
               </a:rPr>
-              <a:t>Under-sedation in the first 10 minutes after intubation.</a:t>
-            </a:r>
-            <a:endParaRPr lang="en-US" sz="1550" dirty="0"/>
+              <a:t>Under-sedation in the first 10 minutes after intubation. Long-acting paralytics outlast a single induction dose. Bolt → sedate → redose sedation BEFORE paralysis wears off.</a:t>
+            </a:r>
+            <a:endParaRPr lang="en-US" sz="1450" dirty="0"/>
           </a:p>
           <a:p>
             <a:pPr marL="177800" indent="-177800">
@@ -4351,13 +4351,13 @@
                 <a:spcPct val="100000"/>
               </a:lnSpc>
               <a:spcAft>
-                <a:spcPts val="900"/>
+                <a:spcPts val="800"/>
               </a:spcAft>
               <a:buSzPct val="100000"/>
               <a:buChar char="•"/>
             </a:pPr>
             <a:r>
-              <a:rPr lang="en-US" sz="1550" dirty="0">
+              <a:rPr lang="en-US" sz="1450" dirty="0">
                 <a:solidFill>
                   <a:srgbClr val="1B2433"/>
                 </a:solidFill>
@@ -4365,9 +4365,9 @@
                 <a:ea typeface="Calibri" pitchFamily="34" charset="-122"/>
                 <a:cs typeface="Calibri" pitchFamily="34" charset="-120"/>
               </a:rPr>
-              <a:t>Over-sedation pre-arrival.</a:t>
-            </a:r>
-            <a:endParaRPr lang="en-US" sz="1550" dirty="0"/>
+              <a:t>Over-sedation pre-arrival. RASS −5 patients can't help with hand-off and are at higher risk of hemodynamic instability. Target RASS −1 to −2 by handoff.</a:t>
+            </a:r>
+            <a:endParaRPr lang="en-US" sz="1450" dirty="0"/>
           </a:p>
           <a:p>
             <a:pPr marL="177800" indent="-177800">
@@ -4375,13 +4375,13 @@
                 <a:spcPct val="100000"/>
               </a:lnSpc>
               <a:spcAft>
-                <a:spcPts val="900"/>
+                <a:spcPts val="800"/>
               </a:spcAft>
               <a:buSzPct val="100000"/>
               <a:buChar char="•"/>
             </a:pPr>
             <a:r>
-              <a:rPr lang="en-US" sz="1550" dirty="0">
+              <a:rPr lang="en-US" sz="1450" dirty="0">
                 <a:solidFill>
                   <a:srgbClr val="1B2433"/>
                 </a:solidFill>
@@ -4389,9 +4389,9 @@
                 <a:ea typeface="Calibri" pitchFamily="34" charset="-122"/>
                 <a:cs typeface="Calibri" pitchFamily="34" charset="-120"/>
               </a:rPr>
-              <a:t>Paralytic without analgesia/sedation.</a:t>
-            </a:r>
-            <a:endParaRPr lang="en-US" sz="1550" dirty="0"/>
+              <a:t>Paralytic without analgesia/sedation. Awareness with paralysis — sentinel safety event. Always pair long-acting paralytics with BOTH.</a:t>
+            </a:r>
+            <a:endParaRPr lang="en-US" sz="1450" dirty="0"/>
           </a:p>
           <a:p>
             <a:pPr marL="177800" indent="-177800">
@@ -4399,13 +4399,13 @@
                 <a:spcPct val="100000"/>
               </a:lnSpc>
               <a:spcAft>
-                <a:spcPts val="900"/>
+                <a:spcPts val="800"/>
               </a:spcAft>
               <a:buSzPct val="100000"/>
               <a:buChar char="•"/>
             </a:pPr>
             <a:r>
-              <a:rPr lang="en-US" sz="1550" dirty="0">
+              <a:rPr lang="en-US" sz="1450" dirty="0">
                 <a:solidFill>
                   <a:srgbClr val="1B2433"/>
                 </a:solidFill>
@@ -4413,9 +4413,9 @@
                 <a:ea typeface="Calibri" pitchFamily="34" charset="-122"/>
                 <a:cs typeface="Calibri" pitchFamily="34" charset="-120"/>
               </a:rPr>
-              <a:t>Post-intubation hypotension.</a:t>
-            </a:r>
-            <a:endParaRPr lang="en-US" sz="1550" dirty="0"/>
+              <a:t>Post-intubation hypotension. ~25% incidence. Push-dose pressors should be in your hand before induction.</a:t>
+            </a:r>
+            <a:endParaRPr lang="en-US" sz="1450" dirty="0"/>
           </a:p>
           <a:p>
             <a:pPr marL="177800" indent="-177800">
@@ -4423,13 +4423,13 @@
                 <a:spcPct val="100000"/>
               </a:lnSpc>
               <a:spcAft>
-                <a:spcPts val="900"/>
+                <a:spcPts val="800"/>
               </a:spcAft>
               <a:buSzPct val="100000"/>
               <a:buChar char="•"/>
             </a:pPr>
             <a:r>
-              <a:rPr lang="en-US" sz="1550" dirty="0">
+              <a:rPr lang="en-US" sz="1450" dirty="0">
                 <a:solidFill>
                   <a:srgbClr val="1B2433"/>
                 </a:solidFill>
@@ -4437,9 +4437,9 @@
                 <a:ea typeface="Calibri" pitchFamily="34" charset="-122"/>
                 <a:cs typeface="Calibri" pitchFamily="34" charset="-120"/>
               </a:rPr>
-              <a:t>Mixing too many agents.</a:t>
-            </a:r>
-            <a:endParaRPr lang="en-US" sz="1550" dirty="0"/>
+              <a:t>Mixing too many agents. Stick with one analgesic + one sedative for transport.</a:t>
+            </a:r>
+            <a:endParaRPr lang="en-US" sz="1450" dirty="0"/>
           </a:p>
         </p:txBody>
       </p:sp>
@@ -4961,7 +4961,9 @@
       </p:sp>
       <p:sp>
         <p:nvSpPr>
-          <p:cNvPr id="14" name="Text 12"/>
+          <p:cNvPr id="14" name="Text 12">
+            <a:hlinkClick r:id="rId1" tooltip="Open this module's simulator mission"/>
+          </p:cNvPr>
           <p:cNvSpPr/>
           <p:nvPr/>
         </p:nvSpPr>
@@ -4984,13 +4986,20 @@
               <a:buNone/>
             </a:pPr>
             <a:r>
-              <a:rPr lang="en-US" sz="1700" b="1" dirty="0">
+              <a:rPr lang="en-US" sz="1700" b="1" u="sng" dirty="0">
                 <a:solidFill>
                   <a:srgbClr val="FFFFFF"/>
                 </a:solidFill>
                 <a:latin typeface="Calibri" pitchFamily="34" charset="0"/>
                 <a:ea typeface="Calibri" pitchFamily="34" charset="-122"/>
                 <a:cs typeface="Calibri" pitchFamily="34" charset="-120"/>
+                <a:hlinkClick r:id="rId1" invalidUrl="" action="" tgtFrame="" tooltip="Open this module's simulator mission" history="1" highlightClick="0" endSnd="0">
+                  <a:extLst>
+                    <a:ext uri="{A12FA001-AC4F-418D-AE19-62706E023703}">
+                      <ahyp:hlinkClr xmlns:ahyp="http://schemas.microsoft.com/office/drawing/2018/hyperlinkcolor" val="tx"/>
+                    </a:ext>
+                  </a:extLst>
+                </a:hlinkClick>
               </a:rPr>
               <a:t>LTV 1200 Simulator</a:t>
             </a:r>
@@ -5023,13 +5032,20 @@
               <a:buNone/>
             </a:pPr>
             <a:r>
-              <a:rPr lang="en-US" sz="1250" dirty="0">
-                <a:solidFill>
-                  <a:srgbClr val="A9C2E0"/>
-                </a:solidFill>
-                <a:latin typeface="Calibri" pitchFamily="34" charset="0"/>
-                <a:ea typeface="Calibri" pitchFamily="34" charset="-122"/>
-                <a:cs typeface="Calibri" pitchFamily="34" charset="-120"/>
+              <a:rPr lang="en-US" sz="1250" u="sng" dirty="0">
+                <a:solidFill>
+                  <a:srgbClr val="7FB0E6"/>
+                </a:solidFill>
+                <a:latin typeface="Calibri" pitchFamily="34" charset="0"/>
+                <a:ea typeface="Calibri" pitchFamily="34" charset="-122"/>
+                <a:cs typeface="Calibri" pitchFamily="34" charset="-120"/>
+                <a:hlinkClick r:id="rId2" invalidUrl="" action="" tgtFrame="" tooltip="" history="1" highlightClick="0" endSnd="0">
+                  <a:extLst>
+                    <a:ext uri="{A12FA001-AC4F-418D-AE19-62706E023703}">
+                      <ahyp:hlinkClr xmlns:ahyp="http://schemas.microsoft.com/office/drawing/2018/hyperlinkcolor" val="tx"/>
+                    </a:ext>
+                  </a:extLst>
+                </a:hlinkClick>
               </a:rPr>
               <a:t>vent-ltv1200.html?scenario=agitation  —  A patient fighting the vent with normal mechanics — recognize when the fix is a drug,…</a:t>
             </a:r>

--- a/vta/slides/Module_8_Sedation_Analgesia.pptx
+++ b/vta/slides/Module_8_Sedation_Analgesia.pptx
@@ -784,7 +784,8 @@
 +4 combative danger to staff. +3 very agitated, pulls at tubes. +2 agitated, fights vent. +1 restless but cooperative.
 0 alert and calm.
 −1 drowsy, sustained eye contact &gt; 10 sec to voice. −2 light sedation, briefly opens eyes to voice. −3 moderate, movement to voice no eye contact. −4 deep, movement to physical stimulus only. −5 unarousable.
-Transport target is RASS −1 to −2. Deeper than −2 makes handoff assessment hard. Lighter than −1 risks self-extubation.</a:t>
+Transport target is RASS −1 to −2. Deeper than −2 makes handoff assessment hard. Lighter than −1 risks self-extubation.
+Critical caveat: RASS CANNOT be scored during neuromuscular blockade — a paralyzed patient always looks calm regardless of awareness. Until paralysis resolves, judge adequacy of analgesia/sedation by autonomic signs (heart rate, blood pressure, lacrimation, diaphoresis), not by RASS.</a:t>
             </a:r>
             <a:endParaRPr lang="en-US" dirty="0"/>
           </a:p>
@@ -3333,13 +3334,13 @@
                 <a:spcPct val="100000"/>
               </a:lnSpc>
               <a:spcAft>
-                <a:spcPts val="800"/>
+                <a:spcPts val="600"/>
               </a:spcAft>
               <a:buSzPct val="100000"/>
               <a:buChar char="•"/>
             </a:pPr>
             <a:r>
-              <a:rPr lang="en-US" sz="1450" dirty="0">
+              <a:rPr lang="en-US" sz="1350" dirty="0">
                 <a:solidFill>
                   <a:srgbClr val="1B2433"/>
                 </a:solidFill>
@@ -3349,7 +3350,7 @@
               </a:rPr>
               <a:t>Richmond Agitation-Sedation Scale runs +4 (combative) to −5 (unarousable).</a:t>
             </a:r>
-            <a:endParaRPr lang="en-US" sz="1450" dirty="0"/>
+            <a:endParaRPr lang="en-US" sz="1350" dirty="0"/>
           </a:p>
           <a:p>
             <a:pPr marL="177800" indent="-177800">
@@ -3357,13 +3358,13 @@
                 <a:spcPct val="100000"/>
               </a:lnSpc>
               <a:spcAft>
-                <a:spcPts val="800"/>
+                <a:spcPts val="600"/>
               </a:spcAft>
               <a:buSzPct val="100000"/>
               <a:buChar char="•"/>
             </a:pPr>
             <a:r>
-              <a:rPr lang="en-US" sz="1450" dirty="0">
+              <a:rPr lang="en-US" sz="1350" dirty="0">
                 <a:solidFill>
                   <a:srgbClr val="1B2433"/>
                 </a:solidFill>
@@ -3373,7 +3374,7 @@
               </a:rPr>
               <a:t>+4 combative danger to staff. +3 very agitated, pulls at tubes. +2 agitated, fights vent. +1 restless but cooperative.</a:t>
             </a:r>
-            <a:endParaRPr lang="en-US" sz="1450" dirty="0"/>
+            <a:endParaRPr lang="en-US" sz="1350" dirty="0"/>
           </a:p>
           <a:p>
             <a:pPr marL="177800" indent="-177800">
@@ -3381,13 +3382,13 @@
                 <a:spcPct val="100000"/>
               </a:lnSpc>
               <a:spcAft>
-                <a:spcPts val="800"/>
+                <a:spcPts val="600"/>
               </a:spcAft>
               <a:buSzPct val="100000"/>
               <a:buChar char="•"/>
             </a:pPr>
             <a:r>
-              <a:rPr lang="en-US" sz="1450" dirty="0">
+              <a:rPr lang="en-US" sz="1350" dirty="0">
                 <a:solidFill>
                   <a:srgbClr val="1B2433"/>
                 </a:solidFill>
@@ -3397,7 +3398,7 @@
               </a:rPr>
               <a:t>0 alert and calm.</a:t>
             </a:r>
-            <a:endParaRPr lang="en-US" sz="1450" dirty="0"/>
+            <a:endParaRPr lang="en-US" sz="1350" dirty="0"/>
           </a:p>
           <a:p>
             <a:pPr marL="177800" indent="-177800">
@@ -3405,13 +3406,13 @@
                 <a:spcPct val="100000"/>
               </a:lnSpc>
               <a:spcAft>
-                <a:spcPts val="800"/>
+                <a:spcPts val="600"/>
               </a:spcAft>
               <a:buSzPct val="100000"/>
               <a:buChar char="•"/>
             </a:pPr>
             <a:r>
-              <a:rPr lang="en-US" sz="1450" dirty="0">
+              <a:rPr lang="en-US" sz="1350" dirty="0">
                 <a:solidFill>
                   <a:srgbClr val="1B2433"/>
                 </a:solidFill>
@@ -3421,7 +3422,7 @@
               </a:rPr>
               <a:t>−1 drowsy, sustained eye contact &gt; 10 sec to voice. −2 light sedation, briefly opens eyes to voice. −3 moderate, movement to voice no eye contact. −4 deep, movement to physical stimulus only.</a:t>
             </a:r>
-            <a:endParaRPr lang="en-US" sz="1450" dirty="0"/>
+            <a:endParaRPr lang="en-US" sz="1350" dirty="0"/>
           </a:p>
           <a:p>
             <a:pPr marL="177800" indent="-177800">
@@ -3429,13 +3430,13 @@
                 <a:spcPct val="100000"/>
               </a:lnSpc>
               <a:spcAft>
-                <a:spcPts val="800"/>
+                <a:spcPts val="600"/>
               </a:spcAft>
               <a:buSzPct val="100000"/>
               <a:buChar char="•"/>
             </a:pPr>
             <a:r>
-              <a:rPr lang="en-US" sz="1450" dirty="0">
+              <a:rPr lang="en-US" sz="1350" dirty="0">
                 <a:solidFill>
                   <a:srgbClr val="1B2433"/>
                 </a:solidFill>
@@ -3445,7 +3446,31 @@
               </a:rPr>
               <a:t>Transport target is RASS −1 to −2. Deeper than −2 makes handoff assessment hard. Lighter than −1 risks self-extubation.</a:t>
             </a:r>
-            <a:endParaRPr lang="en-US" sz="1450" dirty="0"/>
+            <a:endParaRPr lang="en-US" sz="1350" dirty="0"/>
+          </a:p>
+          <a:p>
+            <a:pPr marL="177800" indent="-177800">
+              <a:lnSpc>
+                <a:spcPct val="100000"/>
+              </a:lnSpc>
+              <a:spcAft>
+                <a:spcPts val="600"/>
+              </a:spcAft>
+              <a:buSzPct val="100000"/>
+              <a:buChar char="•"/>
+            </a:pPr>
+            <a:r>
+              <a:rPr lang="en-US" sz="1350" dirty="0">
+                <a:solidFill>
+                  <a:srgbClr val="1B2433"/>
+                </a:solidFill>
+                <a:latin typeface="Calibri" pitchFamily="34" charset="0"/>
+                <a:ea typeface="Calibri" pitchFamily="34" charset="-122"/>
+                <a:cs typeface="Calibri" pitchFamily="34" charset="-120"/>
+              </a:rPr>
+              <a:t>Critical caveat: RASS CANNOT be scored during neuromuscular blockade — a paralyzed patient always looks calm regardless of awareness.</a:t>
+            </a:r>
+            <a:endParaRPr lang="en-US" sz="1350" dirty="0"/>
           </a:p>
         </p:txBody>
       </p:sp>
